--- a/dist/초6/과학/식물과전기/초6_과학_식물과전기_02_전기회로.pptx
+++ b/dist/초6/과학/식물과전기/초6_과학_식물과전기_02_전기회로.pptx
@@ -125,13 +125,13 @@
   <p:extLst>
     <p:ext uri="{521415D9-36F7-43E2-AB2F-B90AF26B5E84}">
       <p14:sectionLst xmlns:p14="http://schemas.microsoft.com/office/powerpoint/2010/main">
-        <p14:section name="도입" id="{0240a595-05c8-3b20-0130-0aada2298abd}">
+        <p14:section name="도입" id="{04890304-adb0-f028-36dc-4e1ea3462282}">
           <p14:sldIdLst>
             <p14:sldId id="256"/>
             <p14:sldId id="257"/>
           </p14:sldIdLst>
         </p14:section>
-        <p14:section name="연습" id="{d18831a6-9aec-5bb0-fd3a-48ba8b7b59b3}">
+        <p14:section name="연습" id="{8f7450e9-99cc-23de-2d43-1b4cb965c6d3}">
           <p14:sldIdLst>
             <p14:sldId id="258"/>
             <p14:sldId id="259"/>
@@ -143,7 +143,7 @@
             <p14:sldId id="269"/>
           </p14:sldIdLst>
         </p14:section>
-        <p14:section name="개념" id="{dada5376-befc-7fcc-696c-75f35d4281a3}">
+        <p14:section name="개념" id="{4591c0f7-1478-a105-816b-809e943a6353}">
           <p14:sldIdLst>
             <p14:sldId id="261"/>
             <p14:sldId id="263"/>
@@ -151,34 +151,34 @@
             <p14:sldId id="268"/>
           </p14:sldIdLst>
         </p14:section>
-        <p14:section name="연습" id="{f7704e66-8bc5-4e5f-db58-57414ffc2d1e}">
+        <p14:section name="연습" id="{f312393b-306f-2d90-ca89-cebcca424982}">
           <p14:sldIdLst/>
         </p14:section>
-        <p14:section name="개념" id="{36468863-b29f-588e-fb91-f42b991645a9}">
+        <p14:section name="개념" id="{fc44d77e-aad4-5c8f-dbbc-4525a102fe62}">
           <p14:sldIdLst/>
         </p14:section>
-        <p14:section name="연습" id="{6d401619-2654-0632-4200-fe43e17058cb}">
+        <p14:section name="연습" id="{d0156a3a-cb95-0594-7224-43c55fce6fef}">
           <p14:sldIdLst/>
         </p14:section>
-        <p14:section name="개념" id="{07c73208-5a3d-65fc-6ad5-46b39981e35c}">
+        <p14:section name="개념" id="{f590e89a-01b1-7e85-0380-59264e55e6a5}">
           <p14:sldIdLst/>
         </p14:section>
-        <p14:section name="연습" id="{81fb539e-f55d-3f90-eab0-0c59503a4f7c}">
+        <p14:section name="연습" id="{2db609f9-1050-85f6-8021-6f50a89ff7ac}">
           <p14:sldIdLst/>
         </p14:section>
-        <p14:section name="확인" id="{68f531f4-fb0e-6c95-4523-1c04e8825d65}">
+        <p14:section name="확인" id="{4802212b-857a-4401-da80-33d78ba143a2}">
           <p14:sldIdLst>
             <p14:sldId id="270"/>
             <p14:sldId id="271"/>
             <p14:sldId id="272"/>
           </p14:sldIdLst>
         </p14:section>
-        <p14:section name="정리" id="{afe21034-7ea3-3442-f31e-c13999ba0ed3}">
+        <p14:section name="정리" id="{670f4498-4645-7e13-7e9d-89a3da1b8732}">
           <p14:sldIdLst>
             <p14:sldId id="273"/>
           </p14:sldIdLst>
         </p14:section>
-        <p14:section name="보충" id="{7b9c5d40-c80b-dd50-7c4a-7254cdeefdcf}">
+        <p14:section name="보충" id="{75ef4a98-df5b-baf0-6f6e-312ee325293a}">
           <p14:sldIdLst>
             <p14:sldId id="274"/>
           </p14:sldIdLst>
@@ -4127,7 +4127,7 @@
         <p:spPr>
           <a:xfrm>
             <a:off x="7764780" y="1680106"/>
-            <a:ext cx="2750887" cy="0"/>
+            <a:ext cx="2673031" cy="0"/>
           </a:xfrm>
           <a:prstGeom prst="line">
             <a:avLst/>
@@ -4149,7 +4149,7 @@
         </p:nvSpPr>
         <p:spPr>
           <a:xfrm>
-            <a:off x="10515667" y="1680106"/>
+            <a:off x="10437811" y="1680106"/>
             <a:ext cx="0" cy="700698"/>
           </a:xfrm>
           <a:prstGeom prst="line">
@@ -4172,8 +4172,8 @@
         </p:nvSpPr>
         <p:spPr>
           <a:xfrm>
-            <a:off x="10515667" y="2380804"/>
-            <a:ext cx="285469" cy="0"/>
+            <a:off x="10437811" y="2380804"/>
+            <a:ext cx="363325" cy="0"/>
           </a:xfrm>
           <a:prstGeom prst="line">
             <a:avLst/>
@@ -14431,7 +14431,7 @@
         <p:spPr>
           <a:xfrm>
             <a:off x="1803654" y="1697812"/>
-            <a:ext cx="2762402" cy="0"/>
+            <a:ext cx="2684221" cy="0"/>
           </a:xfrm>
           <a:prstGeom prst="line">
             <a:avLst/>
@@ -14453,7 +14453,7 @@
         </p:nvSpPr>
         <p:spPr>
           <a:xfrm>
-            <a:off x="4566056" y="1697812"/>
+            <a:off x="4487875" y="1697812"/>
             <a:ext cx="0" cy="703631"/>
           </a:xfrm>
           <a:prstGeom prst="line">
@@ -14476,8 +14476,8 @@
         </p:nvSpPr>
         <p:spPr>
           <a:xfrm>
-            <a:off x="4566056" y="2401443"/>
-            <a:ext cx="286664" cy="0"/>
+            <a:off x="4487875" y="2401443"/>
+            <a:ext cx="364846" cy="0"/>
           </a:xfrm>
           <a:prstGeom prst="line">
             <a:avLst/>
@@ -20351,7 +20351,7 @@
         <p:spPr>
           <a:xfrm>
             <a:off x="2578308" y="2750786"/>
-            <a:ext cx="4235384" cy="0"/>
+            <a:ext cx="4115515" cy="0"/>
           </a:xfrm>
           <a:prstGeom prst="line">
             <a:avLst/>
@@ -20373,7 +20373,7 @@
         </p:nvSpPr>
         <p:spPr>
           <a:xfrm>
-            <a:off x="6813692" y="2750786"/>
+            <a:off x="6693823" y="2750786"/>
             <a:ext cx="0" cy="1078824"/>
           </a:xfrm>
           <a:prstGeom prst="line">
@@ -20396,8 +20396,8 @@
         </p:nvSpPr>
         <p:spPr>
           <a:xfrm>
-            <a:off x="6813692" y="3829610"/>
-            <a:ext cx="439521" cy="0"/>
+            <a:off x="6693823" y="3829610"/>
+            <a:ext cx="559390" cy="0"/>
           </a:xfrm>
           <a:prstGeom prst="line">
             <a:avLst/>
